--- a/balanced_donor_luad/slides/balanced_donor_luad_isp.pptx
+++ b/balanced_donor_luad/slides/balanced_donor_luad_isp.pptx
@@ -8167,7 +8167,7 @@
                 </a:solidFill>
                 <a:latin typeface="Calibri"/>
               </a:rPr>
-              <a:t>Cannot attain significance at any effect size: CD28, CTLA4, PDCD1 (n = 9, 6, 5) — no evidence either way.</a:t>
+              <a:t>Below the design d_min of 11 (registered): CD28, CTLA4, LEF1, PDCD1. Of these, CD28, CTLA4, PDCD1 cannot attain significance at any effect size in this family (post hoc) — no evidence either way.</a:t>
             </a:r>
           </a:p>
           <a:p>
